--- a/output_pptx/Come_Thou_Long-Expected_Jesus.pptx
+++ b/output_pptx/Come_Thou_Long-Expected_Jesus.pptx
@@ -3112,8 +3112,8 @@
         </p:nvSpPr>
         <p:spPr>
           <a:xfrm>
-            <a:off x="594360" y="2258568"/>
-            <a:ext cx="11002975" cy="685800"/>
+            <a:off x="640080" y="2052828"/>
+            <a:ext cx="10911535" cy="731520"/>
           </a:xfrm>
           <a:prstGeom prst="rect">
             <a:avLst/>
@@ -3128,7 +3128,7 @@
           <a:p>
             <a:pPr algn="ctr"/>
             <a:r>
-              <a:rPr sz="4400" b="1" i="0">
+              <a:rPr sz="4800" b="1" i="0">
                 <a:solidFill>
                   <a:srgbClr val="FFFFFF"/>
                 </a:solidFill>
@@ -3147,8 +3147,8 @@
         </p:nvSpPr>
         <p:spPr>
           <a:xfrm>
-            <a:off x="594360" y="2980944"/>
-            <a:ext cx="11002975" cy="347472"/>
+            <a:off x="640080" y="2985516"/>
+            <a:ext cx="10911535" cy="731520"/>
           </a:xfrm>
           <a:prstGeom prst="rect">
             <a:avLst/>
@@ -3163,83 +3163,13 @@
           <a:p>
             <a:pPr algn="ctr"/>
             <a:r>
-              <a:rPr sz="2200" b="0" i="1">
-                <a:solidFill>
-                  <a:srgbClr val="8C8C8C"/>
-                </a:solidFill>
-                <a:latin typeface="Arial"/>
-              </a:rPr>
-              <a:t/>
-            </a:r>
-          </a:p>
-        </p:txBody>
-      </p:sp>
-      <p:sp>
-        <p:nvSpPr>
-          <p:cNvPr id="4" name="TextBox 3"/>
-          <p:cNvSpPr txBox="1"/>
-          <p:nvPr/>
-        </p:nvSpPr>
-        <p:spPr>
-          <a:xfrm>
-            <a:off x="594360" y="3529584"/>
-            <a:ext cx="11002975" cy="685800"/>
-          </a:xfrm>
-          <a:prstGeom prst="rect">
-            <a:avLst/>
-          </a:prstGeom>
-          <a:noFill/>
-        </p:spPr>
-        <p:txBody>
-          <a:bodyPr wrap="square">
-            <a:spAutoFit/>
-          </a:bodyPr>
-          <a:lstStyle/>
-          <a:p>
-            <a:pPr algn="ctr"/>
-            <a:r>
-              <a:rPr sz="4400" b="1" i="0">
+              <a:rPr sz="4800" b="1" i="0">
                 <a:solidFill>
                   <a:srgbClr val="FFFFFF"/>
                 </a:solidFill>
                 <a:latin typeface="Arial"/>
               </a:rPr>
               <a:t>Nascido para libertar o Teu povo</a:t>
-            </a:r>
-          </a:p>
-        </p:txBody>
-      </p:sp>
-      <p:sp>
-        <p:nvSpPr>
-          <p:cNvPr id="5" name="TextBox 4"/>
-          <p:cNvSpPr txBox="1"/>
-          <p:nvPr/>
-        </p:nvSpPr>
-        <p:spPr>
-          <a:xfrm>
-            <a:off x="594360" y="4251960"/>
-            <a:ext cx="11002975" cy="347472"/>
-          </a:xfrm>
-          <a:prstGeom prst="rect">
-            <a:avLst/>
-          </a:prstGeom>
-          <a:noFill/>
-        </p:spPr>
-        <p:txBody>
-          <a:bodyPr wrap="square">
-            <a:spAutoFit/>
-          </a:bodyPr>
-          <a:lstStyle/>
-          <a:p>
-            <a:pPr algn="ctr"/>
-            <a:r>
-              <a:rPr sz="2200" b="0" i="1">
-                <a:solidFill>
-                  <a:srgbClr val="8C8C8C"/>
-                </a:solidFill>
-                <a:latin typeface="Arial"/>
-              </a:rPr>
-              <a:t/>
             </a:r>
           </a:p>
         </p:txBody>
@@ -3278,8 +3208,8 @@
         </p:nvSpPr>
         <p:spPr>
           <a:xfrm>
-            <a:off x="594360" y="2258568"/>
-            <a:ext cx="11002975" cy="685800"/>
+            <a:off x="640080" y="2052828"/>
+            <a:ext cx="10911535" cy="731520"/>
           </a:xfrm>
           <a:prstGeom prst="rect">
             <a:avLst/>
@@ -3294,7 +3224,7 @@
           <a:p>
             <a:pPr algn="ctr"/>
             <a:r>
-              <a:rPr sz="3805" b="1" i="0">
+              <a:rPr sz="4100" b="1" i="0">
                 <a:solidFill>
                   <a:srgbClr val="FFFFFF"/>
                 </a:solidFill>
@@ -3313,8 +3243,8 @@
         </p:nvSpPr>
         <p:spPr>
           <a:xfrm>
-            <a:off x="594360" y="2980944"/>
-            <a:ext cx="11002975" cy="347472"/>
+            <a:off x="640080" y="2985516"/>
+            <a:ext cx="10911535" cy="731520"/>
           </a:xfrm>
           <a:prstGeom prst="rect">
             <a:avLst/>
@@ -3329,83 +3259,13 @@
           <a:p>
             <a:pPr algn="ctr"/>
             <a:r>
-              <a:rPr sz="2200" b="0" i="1">
-                <a:solidFill>
-                  <a:srgbClr val="8C8C8C"/>
-                </a:solidFill>
-                <a:latin typeface="Arial"/>
-              </a:rPr>
-              <a:t/>
-            </a:r>
-          </a:p>
-        </p:txBody>
-      </p:sp>
-      <p:sp>
-        <p:nvSpPr>
-          <p:cNvPr id="4" name="TextBox 3"/>
-          <p:cNvSpPr txBox="1"/>
-          <p:nvPr/>
-        </p:nvSpPr>
-        <p:spPr>
-          <a:xfrm>
-            <a:off x="594360" y="3529584"/>
-            <a:ext cx="11002975" cy="685800"/>
-          </a:xfrm>
-          <a:prstGeom prst="rect">
-            <a:avLst/>
-          </a:prstGeom>
-          <a:noFill/>
-        </p:spPr>
-        <p:txBody>
-          <a:bodyPr wrap="square">
-            <a:spAutoFit/>
-          </a:bodyPr>
-          <a:lstStyle/>
-          <a:p>
-            <a:pPr algn="ctr"/>
-            <a:r>
-              <a:rPr sz="3520" b="1" i="0">
+              <a:rPr sz="3800" b="1" i="0">
                 <a:solidFill>
                   <a:srgbClr val="FFFFFF"/>
                 </a:solidFill>
                 <a:latin typeface="Arial"/>
               </a:rPr>
               <a:t>Deixa-nos encontrar nosso descanso em Ti</a:t>
-            </a:r>
-          </a:p>
-        </p:txBody>
-      </p:sp>
-      <p:sp>
-        <p:nvSpPr>
-          <p:cNvPr id="5" name="TextBox 4"/>
-          <p:cNvSpPr txBox="1"/>
-          <p:nvPr/>
-        </p:nvSpPr>
-        <p:spPr>
-          <a:xfrm>
-            <a:off x="594360" y="4251960"/>
-            <a:ext cx="11002975" cy="347472"/>
-          </a:xfrm>
-          <a:prstGeom prst="rect">
-            <a:avLst/>
-          </a:prstGeom>
-          <a:noFill/>
-        </p:spPr>
-        <p:txBody>
-          <a:bodyPr wrap="square">
-            <a:spAutoFit/>
-          </a:bodyPr>
-          <a:lstStyle/>
-          <a:p>
-            <a:pPr algn="ctr"/>
-            <a:r>
-              <a:rPr sz="2200" b="0" i="1">
-                <a:solidFill>
-                  <a:srgbClr val="8C8C8C"/>
-                </a:solidFill>
-                <a:latin typeface="Arial"/>
-              </a:rPr>
-              <a:t/>
             </a:r>
           </a:p>
         </p:txBody>
@@ -3444,8 +3304,8 @@
         </p:nvSpPr>
         <p:spPr>
           <a:xfrm>
-            <a:off x="594360" y="2258568"/>
-            <a:ext cx="11002975" cy="685800"/>
+            <a:off x="640080" y="2052828"/>
+            <a:ext cx="10911535" cy="731520"/>
           </a:xfrm>
           <a:prstGeom prst="rect">
             <a:avLst/>
@@ -3460,7 +3320,7 @@
           <a:p>
             <a:pPr algn="ctr"/>
             <a:r>
-              <a:rPr sz="4400" b="1" i="0">
+              <a:rPr sz="4800" b="1" i="0">
                 <a:solidFill>
                   <a:srgbClr val="FFFFFF"/>
                 </a:solidFill>
@@ -3479,8 +3339,8 @@
         </p:nvSpPr>
         <p:spPr>
           <a:xfrm>
-            <a:off x="594360" y="2980944"/>
-            <a:ext cx="11002975" cy="347472"/>
+            <a:off x="640080" y="2985516"/>
+            <a:ext cx="10911535" cy="731520"/>
           </a:xfrm>
           <a:prstGeom prst="rect">
             <a:avLst/>
@@ -3495,83 +3355,13 @@
           <a:p>
             <a:pPr algn="ctr"/>
             <a:r>
-              <a:rPr sz="2200" b="0" i="1">
-                <a:solidFill>
-                  <a:srgbClr val="8C8C8C"/>
-                </a:solidFill>
-                <a:latin typeface="Arial"/>
-              </a:rPr>
-              <a:t/>
-            </a:r>
-          </a:p>
-        </p:txBody>
-      </p:sp>
-      <p:sp>
-        <p:nvSpPr>
-          <p:cNvPr id="4" name="TextBox 3"/>
-          <p:cNvSpPr txBox="1"/>
-          <p:nvPr/>
-        </p:nvSpPr>
-        <p:spPr>
-          <a:xfrm>
-            <a:off x="594360" y="3529584"/>
-            <a:ext cx="11002975" cy="685800"/>
-          </a:xfrm>
-          <a:prstGeom prst="rect">
-            <a:avLst/>
-          </a:prstGeom>
-          <a:noFill/>
-        </p:spPr>
-        <p:txBody>
-          <a:bodyPr wrap="square">
-            <a:spAutoFit/>
-          </a:bodyPr>
-          <a:lstStyle/>
-          <a:p>
-            <a:pPr algn="ctr"/>
-            <a:r>
-              <a:rPr sz="4400" b="1" i="0">
+              <a:rPr sz="4800" b="1" i="0">
                 <a:solidFill>
                   <a:srgbClr val="FFFFFF"/>
                 </a:solidFill>
                 <a:latin typeface="Arial"/>
               </a:rPr>
               <a:t>Caro desejo de toda nação</a:t>
-            </a:r>
-          </a:p>
-        </p:txBody>
-      </p:sp>
-      <p:sp>
-        <p:nvSpPr>
-          <p:cNvPr id="5" name="TextBox 4"/>
-          <p:cNvSpPr txBox="1"/>
-          <p:nvPr/>
-        </p:nvSpPr>
-        <p:spPr>
-          <a:xfrm>
-            <a:off x="594360" y="4251960"/>
-            <a:ext cx="11002975" cy="347472"/>
-          </a:xfrm>
-          <a:prstGeom prst="rect">
-            <a:avLst/>
-          </a:prstGeom>
-          <a:noFill/>
-        </p:spPr>
-        <p:txBody>
-          <a:bodyPr wrap="square">
-            <a:spAutoFit/>
-          </a:bodyPr>
-          <a:lstStyle/>
-          <a:p>
-            <a:pPr algn="ctr"/>
-            <a:r>
-              <a:rPr sz="2200" b="0" i="1">
-                <a:solidFill>
-                  <a:srgbClr val="8C8C8C"/>
-                </a:solidFill>
-                <a:latin typeface="Arial"/>
-              </a:rPr>
-              <a:t/>
             </a:r>
           </a:p>
         </p:txBody>
@@ -3610,8 +3400,8 @@
         </p:nvSpPr>
         <p:spPr>
           <a:xfrm>
-            <a:off x="594360" y="2258568"/>
-            <a:ext cx="11002975" cy="685800"/>
+            <a:off x="640080" y="2052828"/>
+            <a:ext cx="10911535" cy="731520"/>
           </a:xfrm>
           <a:prstGeom prst="rect">
             <a:avLst/>
@@ -3626,7 +3416,7 @@
           <a:p>
             <a:pPr algn="ctr"/>
             <a:r>
-              <a:rPr sz="4400" b="1" i="0">
+              <a:rPr sz="4800" b="1" i="0">
                 <a:solidFill>
                   <a:srgbClr val="FFFFFF"/>
                 </a:solidFill>
@@ -3645,8 +3435,8 @@
         </p:nvSpPr>
         <p:spPr>
           <a:xfrm>
-            <a:off x="594360" y="2980944"/>
-            <a:ext cx="11002975" cy="347472"/>
+            <a:off x="640080" y="2985516"/>
+            <a:ext cx="10911535" cy="731520"/>
           </a:xfrm>
           <a:prstGeom prst="rect">
             <a:avLst/>
@@ -3661,83 +3451,13 @@
           <a:p>
             <a:pPr algn="ctr"/>
             <a:r>
-              <a:rPr sz="2200" b="0" i="1">
-                <a:solidFill>
-                  <a:srgbClr val="8C8C8C"/>
-                </a:solidFill>
-                <a:latin typeface="Arial"/>
-              </a:rPr>
-              <a:t/>
-            </a:r>
-          </a:p>
-        </p:txBody>
-      </p:sp>
-      <p:sp>
-        <p:nvSpPr>
-          <p:cNvPr id="4" name="TextBox 3"/>
-          <p:cNvSpPr txBox="1"/>
-          <p:nvPr/>
-        </p:nvSpPr>
-        <p:spPr>
-          <a:xfrm>
-            <a:off x="594360" y="3529584"/>
-            <a:ext cx="11002975" cy="685800"/>
-          </a:xfrm>
-          <a:prstGeom prst="rect">
-            <a:avLst/>
-          </a:prstGeom>
-          <a:noFill/>
-        </p:spPr>
-        <p:txBody>
-          <a:bodyPr wrap="square">
-            <a:spAutoFit/>
-          </a:bodyPr>
-          <a:lstStyle/>
-          <a:p>
-            <a:pPr algn="ctr"/>
-            <a:r>
-              <a:rPr sz="4400" b="1" i="0">
+              <a:rPr sz="4800" b="1" i="0">
                 <a:solidFill>
                   <a:srgbClr val="FFFFFF"/>
                 </a:solidFill>
                 <a:latin typeface="Arial"/>
               </a:rPr>
               <a:t>Nascido Teu povo para libertar</a:t>
-            </a:r>
-          </a:p>
-        </p:txBody>
-      </p:sp>
-      <p:sp>
-        <p:nvSpPr>
-          <p:cNvPr id="5" name="TextBox 4"/>
-          <p:cNvSpPr txBox="1"/>
-          <p:nvPr/>
-        </p:nvSpPr>
-        <p:spPr>
-          <a:xfrm>
-            <a:off x="594360" y="4251960"/>
-            <a:ext cx="11002975" cy="347472"/>
-          </a:xfrm>
-          <a:prstGeom prst="rect">
-            <a:avLst/>
-          </a:prstGeom>
-          <a:noFill/>
-        </p:spPr>
-        <p:txBody>
-          <a:bodyPr wrap="square">
-            <a:spAutoFit/>
-          </a:bodyPr>
-          <a:lstStyle/>
-          <a:p>
-            <a:pPr algn="ctr"/>
-            <a:r>
-              <a:rPr sz="2200" b="0" i="1">
-                <a:solidFill>
-                  <a:srgbClr val="8C8C8C"/>
-                </a:solidFill>
-                <a:latin typeface="Arial"/>
-              </a:rPr>
-              <a:t/>
             </a:r>
           </a:p>
         </p:txBody>
@@ -3776,8 +3496,8 @@
         </p:nvSpPr>
         <p:spPr>
           <a:xfrm>
-            <a:off x="594360" y="1837944"/>
-            <a:ext cx="11002975" cy="685800"/>
+            <a:off x="640080" y="1650492"/>
+            <a:ext cx="10911535" cy="731520"/>
           </a:xfrm>
           <a:prstGeom prst="rect">
             <a:avLst/>
@@ -3792,7 +3512,7 @@
           <a:p>
             <a:pPr algn="ctr"/>
             <a:r>
-              <a:rPr sz="4400" b="1" i="0">
+              <a:rPr sz="4800" b="1" i="0">
                 <a:solidFill>
                   <a:srgbClr val="FFFFFF"/>
                 </a:solidFill>
@@ -3811,8 +3531,8 @@
         </p:nvSpPr>
         <p:spPr>
           <a:xfrm>
-            <a:off x="594360" y="2560320"/>
-            <a:ext cx="11002975" cy="384048"/>
+            <a:off x="640080" y="2418588"/>
+            <a:ext cx="10911535" cy="365760"/>
           </a:xfrm>
           <a:prstGeom prst="rect">
             <a:avLst/>
@@ -3829,7 +3549,7 @@
             <a:r>
               <a:rPr sz="2400" b="0" i="1">
                 <a:solidFill>
-                  <a:srgbClr val="B4B4B4"/>
+                  <a:srgbClr val="AAAAAA"/>
                 </a:solidFill>
                 <a:latin typeface="Arial"/>
               </a:rPr>
@@ -3846,8 +3566,8 @@
         </p:nvSpPr>
         <p:spPr>
           <a:xfrm>
-            <a:off x="594360" y="2980944"/>
-            <a:ext cx="11002975" cy="347472"/>
+            <a:off x="640080" y="2985516"/>
+            <a:ext cx="10911535" cy="731520"/>
           </a:xfrm>
           <a:prstGeom prst="rect">
             <a:avLst/>
@@ -3862,13 +3582,13 @@
           <a:p>
             <a:pPr algn="ctr"/>
             <a:r>
-              <a:rPr sz="2000" b="0" i="1">
-                <a:solidFill>
-                  <a:srgbClr val="8C8C8C"/>
+              <a:rPr sz="4800" b="1" i="0">
+                <a:solidFill>
+                  <a:srgbClr val="FFFFFF"/>
                 </a:solidFill>
                 <a:latin typeface="Arial"/>
               </a:rPr>
-              <a:t>Levanta-nos ao Teu glorioso trono</a:t>
+              <a:t>救いを　もたらす</a:t>
             </a:r>
           </a:p>
         </p:txBody>
@@ -3881,8 +3601,8 @@
         </p:nvSpPr>
         <p:spPr>
           <a:xfrm>
-            <a:off x="594360" y="3529584"/>
-            <a:ext cx="11002975" cy="685800"/>
+            <a:off x="640080" y="3753612"/>
+            <a:ext cx="10911535" cy="365760"/>
           </a:xfrm>
           <a:prstGeom prst="rect">
             <a:avLst/>
@@ -3897,13 +3617,13 @@
           <a:p>
             <a:pPr algn="ctr"/>
             <a:r>
-              <a:rPr sz="4400" b="1" i="0">
-                <a:solidFill>
-                  <a:srgbClr val="FFFFFF"/>
+              <a:rPr sz="2400" b="0" i="1">
+                <a:solidFill>
+                  <a:srgbClr val="AAAAAA"/>
                 </a:solidFill>
                 <a:latin typeface="Arial"/>
               </a:rPr>
-              <a:t>救いを　もたらす</a:t>
+              <a:t>sukui wo motarasu</a:t>
             </a:r>
           </a:p>
         </p:txBody>
@@ -3916,8 +3636,8 @@
         </p:nvSpPr>
         <p:spPr>
           <a:xfrm>
-            <a:off x="594360" y="4251960"/>
-            <a:ext cx="11002975" cy="384048"/>
+            <a:off x="640080" y="4530852"/>
+            <a:ext cx="10911535" cy="310896"/>
           </a:xfrm>
           <a:prstGeom prst="rect">
             <a:avLst/>
@@ -3932,13 +3652,13 @@
           <a:p>
             <a:pPr algn="ctr"/>
             <a:r>
-              <a:rPr sz="2400" b="0" i="1">
-                <a:solidFill>
-                  <a:srgbClr val="B4B4B4"/>
+              <a:rPr sz="2000" b="0" i="1">
+                <a:solidFill>
+                  <a:srgbClr val="828282"/>
                 </a:solidFill>
                 <a:latin typeface="Arial"/>
               </a:rPr>
-              <a:t>sukui wo motarasu</a:t>
+              <a:t>Levanta-nos ao Teu glorioso trono</a:t>
             </a:r>
           </a:p>
         </p:txBody>
@@ -3951,8 +3671,8 @@
         </p:nvSpPr>
         <p:spPr>
           <a:xfrm>
-            <a:off x="594360" y="4672584"/>
-            <a:ext cx="11002975" cy="347472"/>
+            <a:off x="640080" y="4896612"/>
+            <a:ext cx="10911535" cy="310896"/>
           </a:xfrm>
           <a:prstGeom prst="rect">
             <a:avLst/>
@@ -3969,7 +3689,7 @@
             <a:r>
               <a:rPr sz="2000" b="0" i="1">
                 <a:solidFill>
-                  <a:srgbClr val="8C8C8C"/>
+                  <a:srgbClr val="828282"/>
                 </a:solidFill>
                 <a:latin typeface="Arial"/>
               </a:rPr>
@@ -4012,8 +3732,8 @@
         </p:nvSpPr>
         <p:spPr>
           <a:xfrm>
-            <a:off x="594360" y="2258568"/>
-            <a:ext cx="11002975" cy="685800"/>
+            <a:off x="640080" y="2052828"/>
+            <a:ext cx="10911535" cy="731520"/>
           </a:xfrm>
           <a:prstGeom prst="rect">
             <a:avLst/>
@@ -4028,7 +3748,7 @@
           <a:p>
             <a:pPr algn="ctr"/>
             <a:r>
-              <a:rPr sz="4400" b="1" i="0">
+              <a:rPr sz="4800" b="1" i="0">
                 <a:solidFill>
                   <a:srgbClr val="FFFFFF"/>
                 </a:solidFill>
@@ -4047,8 +3767,8 @@
         </p:nvSpPr>
         <p:spPr>
           <a:xfrm>
-            <a:off x="594360" y="2980944"/>
-            <a:ext cx="11002975" cy="347472"/>
+            <a:off x="640080" y="2985516"/>
+            <a:ext cx="10911535" cy="731520"/>
           </a:xfrm>
           <a:prstGeom prst="rect">
             <a:avLst/>
@@ -4063,83 +3783,13 @@
           <a:p>
             <a:pPr algn="ctr"/>
             <a:r>
-              <a:rPr sz="2200" b="0" i="1">
-                <a:solidFill>
-                  <a:srgbClr val="8C8C8C"/>
-                </a:solidFill>
-                <a:latin typeface="Arial"/>
-              </a:rPr>
-              <a:t/>
-            </a:r>
-          </a:p>
-        </p:txBody>
-      </p:sp>
-      <p:sp>
-        <p:nvSpPr>
-          <p:cNvPr id="4" name="TextBox 3"/>
-          <p:cNvSpPr txBox="1"/>
-          <p:nvPr/>
-        </p:nvSpPr>
-        <p:spPr>
-          <a:xfrm>
-            <a:off x="594360" y="3529584"/>
-            <a:ext cx="11002975" cy="685800"/>
-          </a:xfrm>
-          <a:prstGeom prst="rect">
-            <a:avLst/>
-          </a:prstGeom>
-          <a:noFill/>
-        </p:spPr>
-        <p:txBody>
-          <a:bodyPr wrap="square">
-            <a:spAutoFit/>
-          </a:bodyPr>
-          <a:lstStyle/>
-          <a:p>
-            <a:pPr algn="ctr"/>
-            <a:r>
-              <a:rPr sz="4400" b="1" i="0">
+              <a:rPr sz="4800" b="1" i="0">
                 <a:solidFill>
                   <a:srgbClr val="FFFFFF"/>
                 </a:solidFill>
                 <a:latin typeface="Arial"/>
               </a:rPr>
               <a:t>Pelo Teu próprio Espírito eterno</a:t>
-            </a:r>
-          </a:p>
-        </p:txBody>
-      </p:sp>
-      <p:sp>
-        <p:nvSpPr>
-          <p:cNvPr id="5" name="TextBox 4"/>
-          <p:cNvSpPr txBox="1"/>
-          <p:nvPr/>
-        </p:nvSpPr>
-        <p:spPr>
-          <a:xfrm>
-            <a:off x="594360" y="4251960"/>
-            <a:ext cx="11002975" cy="347472"/>
-          </a:xfrm>
-          <a:prstGeom prst="rect">
-            <a:avLst/>
-          </a:prstGeom>
-          <a:noFill/>
-        </p:spPr>
-        <p:txBody>
-          <a:bodyPr wrap="square">
-            <a:spAutoFit/>
-          </a:bodyPr>
-          <a:lstStyle/>
-          <a:p>
-            <a:pPr algn="ctr"/>
-            <a:r>
-              <a:rPr sz="2200" b="0" i="1">
-                <a:solidFill>
-                  <a:srgbClr val="8C8C8C"/>
-                </a:solidFill>
-                <a:latin typeface="Arial"/>
-              </a:rPr>
-              <a:t/>
             </a:r>
           </a:p>
         </p:txBody>
@@ -4178,8 +3828,8 @@
         </p:nvSpPr>
         <p:spPr>
           <a:xfrm>
-            <a:off x="594360" y="2258568"/>
-            <a:ext cx="11002975" cy="685800"/>
+            <a:off x="640080" y="2052828"/>
+            <a:ext cx="10911535" cy="731520"/>
           </a:xfrm>
           <a:prstGeom prst="rect">
             <a:avLst/>
@@ -4194,7 +3844,7 @@
           <a:p>
             <a:pPr algn="ctr"/>
             <a:r>
-              <a:rPr sz="4400" b="1" i="0">
+              <a:rPr sz="4800" b="1" i="0">
                 <a:solidFill>
                   <a:srgbClr val="FFFFFF"/>
                 </a:solidFill>
@@ -4213,8 +3863,8 @@
         </p:nvSpPr>
         <p:spPr>
           <a:xfrm>
-            <a:off x="594360" y="2980944"/>
-            <a:ext cx="11002975" cy="347472"/>
+            <a:off x="640080" y="2985516"/>
+            <a:ext cx="10911535" cy="731520"/>
           </a:xfrm>
           <a:prstGeom prst="rect">
             <a:avLst/>
@@ -4229,83 +3879,13 @@
           <a:p>
             <a:pPr algn="ctr"/>
             <a:r>
-              <a:rPr sz="2200" b="0" i="1">
-                <a:solidFill>
-                  <a:srgbClr val="8C8C8C"/>
-                </a:solidFill>
-                <a:latin typeface="Arial"/>
-              </a:rPr>
-              <a:t/>
-            </a:r>
-          </a:p>
-        </p:txBody>
-      </p:sp>
-      <p:sp>
-        <p:nvSpPr>
-          <p:cNvPr id="4" name="TextBox 3"/>
-          <p:cNvSpPr txBox="1"/>
-          <p:nvPr/>
-        </p:nvSpPr>
-        <p:spPr>
-          <a:xfrm>
-            <a:off x="594360" y="3529584"/>
-            <a:ext cx="11002975" cy="685800"/>
-          </a:xfrm>
-          <a:prstGeom prst="rect">
-            <a:avLst/>
-          </a:prstGeom>
-          <a:noFill/>
-        </p:spPr>
-        <p:txBody>
-          <a:bodyPr wrap="square">
-            <a:spAutoFit/>
-          </a:bodyPr>
-          <a:lstStyle/>
-          <a:p>
-            <a:pPr algn="ctr"/>
-            <a:r>
-              <a:rPr sz="4400" b="1" i="0">
+              <a:rPr sz="4800" b="1" i="0">
                 <a:solidFill>
                   <a:srgbClr val="FFFFFF"/>
                 </a:solidFill>
                 <a:latin typeface="Arial"/>
               </a:rPr>
               <a:t>Por Teu suficiente mérito</a:t>
-            </a:r>
-          </a:p>
-        </p:txBody>
-      </p:sp>
-      <p:sp>
-        <p:nvSpPr>
-          <p:cNvPr id="5" name="TextBox 4"/>
-          <p:cNvSpPr txBox="1"/>
-          <p:nvPr/>
-        </p:nvSpPr>
-        <p:spPr>
-          <a:xfrm>
-            <a:off x="594360" y="4251960"/>
-            <a:ext cx="11002975" cy="347472"/>
-          </a:xfrm>
-          <a:prstGeom prst="rect">
-            <a:avLst/>
-          </a:prstGeom>
-          <a:noFill/>
-        </p:spPr>
-        <p:txBody>
-          <a:bodyPr wrap="square">
-            <a:spAutoFit/>
-          </a:bodyPr>
-          <a:lstStyle/>
-          <a:p>
-            <a:pPr algn="ctr"/>
-            <a:r>
-              <a:rPr sz="2200" b="0" i="1">
-                <a:solidFill>
-                  <a:srgbClr val="8C8C8C"/>
-                </a:solidFill>
-                <a:latin typeface="Arial"/>
-              </a:rPr>
-              <a:t/>
             </a:r>
           </a:p>
         </p:txBody>
@@ -4344,8 +3924,8 @@
         </p:nvSpPr>
         <p:spPr>
           <a:xfrm>
-            <a:off x="594360" y="2258568"/>
-            <a:ext cx="11002975" cy="685800"/>
+            <a:off x="640080" y="2052828"/>
+            <a:ext cx="10911535" cy="731520"/>
           </a:xfrm>
           <a:prstGeom prst="rect">
             <a:avLst/>
@@ -4360,7 +3940,7 @@
           <a:p>
             <a:pPr algn="ctr"/>
             <a:r>
-              <a:rPr sz="4266" b="1" i="0">
+              <a:rPr sz="4600" b="1" i="0">
                 <a:solidFill>
                   <a:srgbClr val="FFFFFF"/>
                 </a:solidFill>
@@ -4379,8 +3959,8 @@
         </p:nvSpPr>
         <p:spPr>
           <a:xfrm>
-            <a:off x="594360" y="2980944"/>
-            <a:ext cx="11002975" cy="347472"/>
+            <a:off x="640080" y="2985516"/>
+            <a:ext cx="10911535" cy="731520"/>
           </a:xfrm>
           <a:prstGeom prst="rect">
             <a:avLst/>
@@ -4395,13 +3975,13 @@
           <a:p>
             <a:pPr algn="ctr"/>
             <a:r>
-              <a:rPr sz="2200" b="0" i="1">
-                <a:solidFill>
-                  <a:srgbClr val="8C8C8C"/>
+              <a:rPr sz="4600" b="1" i="0">
+                <a:solidFill>
+                  <a:srgbClr val="FFFFFF"/>
                 </a:solidFill>
                 <a:latin typeface="Arial"/>
               </a:rPr>
-              <a:t>インマヌエル</a:t>
+              <a:t>Levanta-nos ao Teu glorioso trono</a:t>
             </a:r>
           </a:p>
         </p:txBody>
@@ -4414,8 +3994,8 @@
         </p:nvSpPr>
         <p:spPr>
           <a:xfrm>
-            <a:off x="594360" y="3529584"/>
-            <a:ext cx="11002975" cy="685800"/>
+            <a:off x="640080" y="4128516"/>
+            <a:ext cx="10911535" cy="310896"/>
           </a:xfrm>
           <a:prstGeom prst="rect">
             <a:avLst/>
@@ -4430,13 +4010,13 @@
           <a:p>
             <a:pPr algn="ctr"/>
             <a:r>
-              <a:rPr sz="4266" b="1" i="0">
-                <a:solidFill>
-                  <a:srgbClr val="FFFFFF"/>
+              <a:rPr sz="2000" b="0" i="0">
+                <a:solidFill>
+                  <a:srgbClr val="828282"/>
                 </a:solidFill>
                 <a:latin typeface="Arial"/>
               </a:rPr>
-              <a:t>Levanta-nos ao Teu glorioso trono</a:t>
+              <a:t>インマヌエル</a:t>
             </a:r>
           </a:p>
         </p:txBody>
@@ -4449,8 +4029,8 @@
         </p:nvSpPr>
         <p:spPr>
           <a:xfrm>
-            <a:off x="594360" y="4251960"/>
-            <a:ext cx="11002975" cy="347472"/>
+            <a:off x="640080" y="4494276"/>
+            <a:ext cx="10911535" cy="310896"/>
           </a:xfrm>
           <a:prstGeom prst="rect">
             <a:avLst/>
@@ -4465,9 +4045,9 @@
           <a:p>
             <a:pPr algn="ctr"/>
             <a:r>
-              <a:rPr sz="2200" b="0" i="1">
-                <a:solidFill>
-                  <a:srgbClr val="8C8C8C"/>
+              <a:rPr sz="2000" b="0" i="0">
+                <a:solidFill>
+                  <a:srgbClr val="828282"/>
                 </a:solidFill>
                 <a:latin typeface="Arial"/>
               </a:rPr>
@@ -4510,8 +4090,8 @@
         </p:nvSpPr>
         <p:spPr>
           <a:xfrm>
-            <a:off x="594360" y="2258568"/>
-            <a:ext cx="11002975" cy="685800"/>
+            <a:off x="640080" y="2052828"/>
+            <a:ext cx="10911535" cy="731520"/>
           </a:xfrm>
           <a:prstGeom prst="rect">
             <a:avLst/>
@@ -4526,7 +4106,7 @@
           <a:p>
             <a:pPr algn="ctr"/>
             <a:r>
-              <a:rPr sz="4266" b="1" i="0">
+              <a:rPr sz="4600" b="1" i="0">
                 <a:solidFill>
                   <a:srgbClr val="FFFFFF"/>
                 </a:solidFill>
@@ -4545,8 +4125,8 @@
         </p:nvSpPr>
         <p:spPr>
           <a:xfrm>
-            <a:off x="594360" y="2980944"/>
-            <a:ext cx="11002975" cy="347472"/>
+            <a:off x="640080" y="2985516"/>
+            <a:ext cx="10911535" cy="731520"/>
           </a:xfrm>
           <a:prstGeom prst="rect">
             <a:avLst/>
@@ -4561,13 +4141,13 @@
           <a:p>
             <a:pPr algn="ctr"/>
             <a:r>
-              <a:rPr sz="2200" b="0" i="1">
-                <a:solidFill>
-                  <a:srgbClr val="8C8C8C"/>
+              <a:rPr sz="4600" b="1" i="0">
+                <a:solidFill>
+                  <a:srgbClr val="FFFFFF"/>
                 </a:solidFill>
                 <a:latin typeface="Arial"/>
               </a:rPr>
-              <a:t>インマヌエル</a:t>
+              <a:t>Levanta-nos ao Teu glorioso trono</a:t>
             </a:r>
           </a:p>
         </p:txBody>
@@ -4580,8 +4160,8 @@
         </p:nvSpPr>
         <p:spPr>
           <a:xfrm>
-            <a:off x="594360" y="3529584"/>
-            <a:ext cx="11002975" cy="685800"/>
+            <a:off x="640080" y="4128516"/>
+            <a:ext cx="10911535" cy="310896"/>
           </a:xfrm>
           <a:prstGeom prst="rect">
             <a:avLst/>
@@ -4596,13 +4176,13 @@
           <a:p>
             <a:pPr algn="ctr"/>
             <a:r>
-              <a:rPr sz="4266" b="1" i="0">
-                <a:solidFill>
-                  <a:srgbClr val="FFFFFF"/>
+              <a:rPr sz="2000" b="0" i="0">
+                <a:solidFill>
+                  <a:srgbClr val="828282"/>
                 </a:solidFill>
                 <a:latin typeface="Arial"/>
               </a:rPr>
-              <a:t>Levanta-nos ao Teu glorioso trono</a:t>
+              <a:t>インマヌエル</a:t>
             </a:r>
           </a:p>
         </p:txBody>
@@ -4615,8 +4195,8 @@
         </p:nvSpPr>
         <p:spPr>
           <a:xfrm>
-            <a:off x="594360" y="4251960"/>
-            <a:ext cx="11002975" cy="347472"/>
+            <a:off x="640080" y="4494276"/>
+            <a:ext cx="10911535" cy="310896"/>
           </a:xfrm>
           <a:prstGeom prst="rect">
             <a:avLst/>
@@ -4631,9 +4211,9 @@
           <a:p>
             <a:pPr algn="ctr"/>
             <a:r>
-              <a:rPr sz="2200" b="0" i="1">
-                <a:solidFill>
-                  <a:srgbClr val="8C8C8C"/>
+              <a:rPr sz="2000" b="0" i="0">
+                <a:solidFill>
+                  <a:srgbClr val="828282"/>
                 </a:solidFill>
                 <a:latin typeface="Arial"/>
               </a:rPr>

--- a/output_pptx/Come_Thou_Long-Expected_Jesus.pptx
+++ b/output_pptx/Come_Thou_Long-Expected_Jesus.pptx
@@ -3174,6 +3174,76 @@
           </a:p>
         </p:txBody>
       </p:sp>
+      <p:sp>
+        <p:nvSpPr>
+          <p:cNvPr id="4" name="TextBox 3"/>
+          <p:cNvSpPr txBox="1"/>
+          <p:nvPr/>
+        </p:nvSpPr>
+        <p:spPr>
+          <a:xfrm>
+            <a:off x="640080" y="4128516"/>
+            <a:ext cx="10911535" cy="310896"/>
+          </a:xfrm>
+          <a:prstGeom prst="rect">
+            <a:avLst/>
+          </a:prstGeom>
+          <a:noFill/>
+        </p:spPr>
+        <p:txBody>
+          <a:bodyPr wrap="square">
+            <a:spAutoFit/>
+          </a:bodyPr>
+          <a:lstStyle/>
+          <a:p>
+            <a:pPr algn="ctr"/>
+            <a:r>
+              <a:rPr sz="2000" b="0" i="0">
+                <a:solidFill>
+                  <a:srgbClr val="828282"/>
+                </a:solidFill>
+                <a:latin typeface="Arial"/>
+              </a:rPr>
+              <a:t>待ち望まれていたイエスよ、来てください</a:t>
+            </a:r>
+          </a:p>
+        </p:txBody>
+      </p:sp>
+      <p:sp>
+        <p:nvSpPr>
+          <p:cNvPr id="5" name="TextBox 4"/>
+          <p:cNvSpPr txBox="1"/>
+          <p:nvPr/>
+        </p:nvSpPr>
+        <p:spPr>
+          <a:xfrm>
+            <a:off x="640080" y="4494276"/>
+            <a:ext cx="10911535" cy="310896"/>
+          </a:xfrm>
+          <a:prstGeom prst="rect">
+            <a:avLst/>
+          </a:prstGeom>
+          <a:noFill/>
+        </p:spPr>
+        <p:txBody>
+          <a:bodyPr wrap="square">
+            <a:spAutoFit/>
+          </a:bodyPr>
+          <a:lstStyle/>
+          <a:p>
+            <a:pPr algn="ctr"/>
+            <a:r>
+              <a:rPr sz="2000" b="0" i="0">
+                <a:solidFill>
+                  <a:srgbClr val="828282"/>
+                </a:solidFill>
+                <a:latin typeface="Arial"/>
+              </a:rPr>
+              <a:t>あなたの民を解放するために生まれた方よ</a:t>
+            </a:r>
+          </a:p>
+        </p:txBody>
+      </p:sp>
     </p:spTree>
   </p:cSld>
   <p:clrMapOvr>
@@ -3270,6 +3340,76 @@
           </a:p>
         </p:txBody>
       </p:sp>
+      <p:sp>
+        <p:nvSpPr>
+          <p:cNvPr id="4" name="TextBox 3"/>
+          <p:cNvSpPr txBox="1"/>
+          <p:nvPr/>
+        </p:nvSpPr>
+        <p:spPr>
+          <a:xfrm>
+            <a:off x="640080" y="4128516"/>
+            <a:ext cx="10911535" cy="310896"/>
+          </a:xfrm>
+          <a:prstGeom prst="rect">
+            <a:avLst/>
+          </a:prstGeom>
+          <a:noFill/>
+        </p:spPr>
+        <p:txBody>
+          <a:bodyPr wrap="square">
+            <a:spAutoFit/>
+          </a:bodyPr>
+          <a:lstStyle/>
+          <a:p>
+            <a:pPr algn="ctr"/>
+            <a:r>
+              <a:rPr sz="2000" b="0" i="0">
+                <a:solidFill>
+                  <a:srgbClr val="828282"/>
+                </a:solidFill>
+                <a:latin typeface="Arial"/>
+              </a:rPr>
+              <a:t>私たちを恐れと罪から救い出してください</a:t>
+            </a:r>
+          </a:p>
+        </p:txBody>
+      </p:sp>
+      <p:sp>
+        <p:nvSpPr>
+          <p:cNvPr id="5" name="TextBox 4"/>
+          <p:cNvSpPr txBox="1"/>
+          <p:nvPr/>
+        </p:nvSpPr>
+        <p:spPr>
+          <a:xfrm>
+            <a:off x="640080" y="4494276"/>
+            <a:ext cx="10911535" cy="310896"/>
+          </a:xfrm>
+          <a:prstGeom prst="rect">
+            <a:avLst/>
+          </a:prstGeom>
+          <a:noFill/>
+        </p:spPr>
+        <p:txBody>
+          <a:bodyPr wrap="square">
+            <a:spAutoFit/>
+          </a:bodyPr>
+          <a:lstStyle/>
+          <a:p>
+            <a:pPr algn="ctr"/>
+            <a:r>
+              <a:rPr sz="2000" b="0" i="0">
+                <a:solidFill>
+                  <a:srgbClr val="828282"/>
+                </a:solidFill>
+                <a:latin typeface="Arial"/>
+              </a:rPr>
+              <a:t>あなたの中に私たちの安息を見出させてください</a:t>
+            </a:r>
+          </a:p>
+        </p:txBody>
+      </p:sp>
     </p:spTree>
   </p:cSld>
   <p:clrMapOvr>
@@ -3366,6 +3506,76 @@
           </a:p>
         </p:txBody>
       </p:sp>
+      <p:sp>
+        <p:nvSpPr>
+          <p:cNvPr id="4" name="TextBox 3"/>
+          <p:cNvSpPr txBox="1"/>
+          <p:nvPr/>
+        </p:nvSpPr>
+        <p:spPr>
+          <a:xfrm>
+            <a:off x="640080" y="4128516"/>
+            <a:ext cx="10911535" cy="310896"/>
+          </a:xfrm>
+          <a:prstGeom prst="rect">
+            <a:avLst/>
+          </a:prstGeom>
+          <a:noFill/>
+        </p:spPr>
+        <p:txBody>
+          <a:bodyPr wrap="square">
+            <a:spAutoFit/>
+          </a:bodyPr>
+          <a:lstStyle/>
+          <a:p>
+            <a:pPr algn="ctr"/>
+            <a:r>
+              <a:rPr sz="2000" b="0" i="0">
+                <a:solidFill>
+                  <a:srgbClr val="828282"/>
+                </a:solidFill>
+                <a:latin typeface="Arial"/>
+              </a:rPr>
+              <a:t>あなたは全地の希望です</a:t>
+            </a:r>
+          </a:p>
+        </p:txBody>
+      </p:sp>
+      <p:sp>
+        <p:nvSpPr>
+          <p:cNvPr id="5" name="TextBox 4"/>
+          <p:cNvSpPr txBox="1"/>
+          <p:nvPr/>
+        </p:nvSpPr>
+        <p:spPr>
+          <a:xfrm>
+            <a:off x="640080" y="4494276"/>
+            <a:ext cx="10911535" cy="310896"/>
+          </a:xfrm>
+          <a:prstGeom prst="rect">
+            <a:avLst/>
+          </a:prstGeom>
+          <a:noFill/>
+        </p:spPr>
+        <p:txBody>
+          <a:bodyPr wrap="square">
+            <a:spAutoFit/>
+          </a:bodyPr>
+          <a:lstStyle/>
+          <a:p>
+            <a:pPr algn="ctr"/>
+            <a:r>
+              <a:rPr sz="2000" b="0" i="0">
+                <a:solidFill>
+                  <a:srgbClr val="828282"/>
+                </a:solidFill>
+                <a:latin typeface="Arial"/>
+              </a:rPr>
+              <a:t>すべての国の最愛なる願いよ</a:t>
+            </a:r>
+          </a:p>
+        </p:txBody>
+      </p:sp>
     </p:spTree>
   </p:cSld>
   <p:clrMapOvr>
@@ -3462,6 +3672,76 @@
           </a:p>
         </p:txBody>
       </p:sp>
+      <p:sp>
+        <p:nvSpPr>
+          <p:cNvPr id="4" name="TextBox 3"/>
+          <p:cNvSpPr txBox="1"/>
+          <p:nvPr/>
+        </p:nvSpPr>
+        <p:spPr>
+          <a:xfrm>
+            <a:off x="640080" y="4128516"/>
+            <a:ext cx="10911535" cy="310896"/>
+          </a:xfrm>
+          <a:prstGeom prst="rect">
+            <a:avLst/>
+          </a:prstGeom>
+          <a:noFill/>
+        </p:spPr>
+        <p:txBody>
+          <a:bodyPr wrap="square">
+            <a:spAutoFit/>
+          </a:bodyPr>
+          <a:lstStyle/>
+          <a:p>
+            <a:pPr algn="ctr"/>
+            <a:r>
+              <a:rPr sz="2000" b="0" i="0">
+                <a:solidFill>
+                  <a:srgbClr val="828282"/>
+                </a:solidFill>
+                <a:latin typeface="Arial"/>
+              </a:rPr>
+              <a:t>切望するすべての心の喜びよ</a:t>
+            </a:r>
+          </a:p>
+        </p:txBody>
+      </p:sp>
+      <p:sp>
+        <p:nvSpPr>
+          <p:cNvPr id="5" name="TextBox 4"/>
+          <p:cNvSpPr txBox="1"/>
+          <p:nvPr/>
+        </p:nvSpPr>
+        <p:spPr>
+          <a:xfrm>
+            <a:off x="640080" y="4494276"/>
+            <a:ext cx="10911535" cy="310896"/>
+          </a:xfrm>
+          <a:prstGeom prst="rect">
+            <a:avLst/>
+          </a:prstGeom>
+          <a:noFill/>
+        </p:spPr>
+        <p:txBody>
+          <a:bodyPr wrap="square">
+            <a:spAutoFit/>
+          </a:bodyPr>
+          <a:lstStyle/>
+          <a:p>
+            <a:pPr algn="ctr"/>
+            <a:r>
+              <a:rPr sz="2000" b="0" i="0">
+                <a:solidFill>
+                  <a:srgbClr val="828282"/>
+                </a:solidFill>
+                <a:latin typeface="Arial"/>
+              </a:rPr>
+              <a:t>あなたの民を解放するために生まれた方よ</a:t>
+            </a:r>
+          </a:p>
+        </p:txBody>
+      </p:sp>
     </p:spTree>
   </p:cSld>
   <p:clrMapOvr>
@@ -3794,6 +4074,76 @@
           </a:p>
         </p:txBody>
       </p:sp>
+      <p:sp>
+        <p:nvSpPr>
+          <p:cNvPr id="4" name="TextBox 3"/>
+          <p:cNvSpPr txBox="1"/>
+          <p:nvPr/>
+        </p:nvSpPr>
+        <p:spPr>
+          <a:xfrm>
+            <a:off x="640080" y="4128516"/>
+            <a:ext cx="10911535" cy="310896"/>
+          </a:xfrm>
+          <a:prstGeom prst="rect">
+            <a:avLst/>
+          </a:prstGeom>
+          <a:noFill/>
+        </p:spPr>
+        <p:txBody>
+          <a:bodyPr wrap="square">
+            <a:spAutoFit/>
+          </a:bodyPr>
+          <a:lstStyle/>
+          <a:p>
+            <a:pPr algn="ctr"/>
+            <a:r>
+              <a:rPr sz="2000" b="0" i="0">
+                <a:solidFill>
+                  <a:srgbClr val="828282"/>
+                </a:solidFill>
+                <a:latin typeface="Arial"/>
+              </a:rPr>
+              <a:t>すべての人の心の中で統治してください</a:t>
+            </a:r>
+          </a:p>
+        </p:txBody>
+      </p:sp>
+      <p:sp>
+        <p:nvSpPr>
+          <p:cNvPr id="5" name="TextBox 4"/>
+          <p:cNvSpPr txBox="1"/>
+          <p:nvPr/>
+        </p:nvSpPr>
+        <p:spPr>
+          <a:xfrm>
+            <a:off x="640080" y="4494276"/>
+            <a:ext cx="10911535" cy="310896"/>
+          </a:xfrm>
+          <a:prstGeom prst="rect">
+            <a:avLst/>
+          </a:prstGeom>
+          <a:noFill/>
+        </p:spPr>
+        <p:txBody>
+          <a:bodyPr wrap="square">
+            <a:spAutoFit/>
+          </a:bodyPr>
+          <a:lstStyle/>
+          <a:p>
+            <a:pPr algn="ctr"/>
+            <a:r>
+              <a:rPr sz="2000" b="0" i="0">
+                <a:solidFill>
+                  <a:srgbClr val="828282"/>
+                </a:solidFill>
+                <a:latin typeface="Arial"/>
+              </a:rPr>
+              <a:t>あなたの永遠の聖霊によって</a:t>
+            </a:r>
+          </a:p>
+        </p:txBody>
+      </p:sp>
     </p:spTree>
   </p:cSld>
   <p:clrMapOvr>
@@ -3886,6 +4236,76 @@
                 <a:latin typeface="Arial"/>
               </a:rPr>
               <a:t>Por Teu suficiente mérito</a:t>
+            </a:r>
+          </a:p>
+        </p:txBody>
+      </p:sp>
+      <p:sp>
+        <p:nvSpPr>
+          <p:cNvPr id="4" name="TextBox 3"/>
+          <p:cNvSpPr txBox="1"/>
+          <p:nvPr/>
+        </p:nvSpPr>
+        <p:spPr>
+          <a:xfrm>
+            <a:off x="640080" y="4128516"/>
+            <a:ext cx="10911535" cy="310896"/>
+          </a:xfrm>
+          <a:prstGeom prst="rect">
+            <a:avLst/>
+          </a:prstGeom>
+          <a:noFill/>
+        </p:spPr>
+        <p:txBody>
+          <a:bodyPr wrap="square">
+            <a:spAutoFit/>
+          </a:bodyPr>
+          <a:lstStyle/>
+          <a:p>
+            <a:pPr algn="ctr"/>
+            <a:r>
+              <a:rPr sz="2000" b="0" i="0">
+                <a:solidFill>
+                  <a:srgbClr val="828282"/>
+                </a:solidFill>
+                <a:latin typeface="Arial"/>
+              </a:rPr>
+              <a:t>あなたのみが私たちの心に統治してください</a:t>
+            </a:r>
+          </a:p>
+        </p:txBody>
+      </p:sp>
+      <p:sp>
+        <p:nvSpPr>
+          <p:cNvPr id="5" name="TextBox 4"/>
+          <p:cNvSpPr txBox="1"/>
+          <p:nvPr/>
+        </p:nvSpPr>
+        <p:spPr>
+          <a:xfrm>
+            <a:off x="640080" y="4494276"/>
+            <a:ext cx="10911535" cy="310896"/>
+          </a:xfrm>
+          <a:prstGeom prst="rect">
+            <a:avLst/>
+          </a:prstGeom>
+          <a:noFill/>
+        </p:spPr>
+        <p:txBody>
+          <a:bodyPr wrap="square">
+            <a:spAutoFit/>
+          </a:bodyPr>
+          <a:lstStyle/>
+          <a:p>
+            <a:pPr algn="ctr"/>
+            <a:r>
+              <a:rPr sz="2000" b="0" i="0">
+                <a:solidFill>
+                  <a:srgbClr val="828282"/>
+                </a:solidFill>
+                <a:latin typeface="Arial"/>
+              </a:rPr>
+              <a:t>あなたの十分なる価値によって</a:t>
             </a:r>
           </a:p>
         </p:txBody>
